--- a/week-04/presentations/ppts/day-01-monolith-vs-microservices.pptx
+++ b/week-04/presentations/ppts/day-01-monolith-vs-microservices.pptx
@@ -7803,7 +7803,16 @@
             </a:pPr>
             <a:r>
               <a:rPr/>
-              <a:t>Whose deployment cadence does separation protect?</a:t>
+              <a:t>Whose deployment cadence does separation protect? If only one team owns it, separation buys mostly ops cost.</a:t>
+            </a:r>
+          </a:p>
+          <a:p>
+            <a:pPr lvl="0" indent="-342900" marL="342900">
+              <a:buAutoNum startAt="2" type="arabicPeriod"/>
+            </a:pPr>
+            <a:r>
+              <a:rPr/>
+              <a:t>Failure domain</a:t>
             </a:r>
           </a:p>
           <a:p>
@@ -7812,38 +7821,11 @@
             </a:pPr>
             <a:r>
               <a:rPr/>
-              <a:t>If only one team owns it, separation buys mostly ops cost.</a:t>
-            </a:r>
-          </a:p>
-          <a:p>
-            <a:pPr lvl="1" indent="-342900" marL="685800">
-              <a:buAutoNum startAt="2" type="arabicPeriod"/>
-            </a:pPr>
-            <a:r>
-              <a:rPr/>
-              <a:t>Failure domain</a:t>
-            </a:r>
-          </a:p>
-          <a:p>
-            <a:pPr lvl="2" indent="0" marL="685800">
-              <a:buNone/>
-            </a:pPr>
-            <a:r>
-              <a:rPr/>
-              <a:t>What independent failure do we want?</a:t>
-            </a:r>
-          </a:p>
-          <a:p>
-            <a:pPr lvl="2" indent="0" marL="685800">
-              <a:buNone/>
-            </a:pPr>
-            <a:r>
-              <a:rPr/>
-              <a:t>If the feature can’t function without its dependencies anyway, separation buys no resilience.</a:t>
-            </a:r>
-          </a:p>
-          <a:p>
-            <a:pPr lvl="2" indent="-342900" marL="1028700">
+              <a:t>What independent failure do we want? If the feature can’t function without its dependencies anyway, separation buys no resilience.</a:t>
+            </a:r>
+          </a:p>
+          <a:p>
+            <a:pPr lvl="0" indent="-342900" marL="342900">
               <a:buAutoNum startAt="3" type="arabicPeriod"/>
             </a:pPr>
             <a:r>
@@ -7852,25 +7834,16 @@
             </a:r>
           </a:p>
           <a:p>
-            <a:pPr lvl="3" indent="0" marL="1028700">
-              <a:buNone/>
-            </a:pPr>
-            <a:r>
-              <a:rPr/>
-              <a:t>What scale curve are we anticipating?</a:t>
-            </a:r>
-          </a:p>
-          <a:p>
-            <a:pPr lvl="3" indent="0" marL="1028700">
-              <a:buNone/>
-            </a:pPr>
-            <a:r>
-              <a:rPr/>
-              <a:t>If load is uniform, one runtime is cheaper.</a:t>
-            </a:r>
-          </a:p>
-          <a:p>
-            <a:pPr lvl="3" indent="0" marL="1028700">
+            <a:pPr lvl="1" indent="0" marL="342900">
+              <a:buNone/>
+            </a:pPr>
+            <a:r>
+              <a:rPr/>
+              <a:t>What scale curve are we anticipating? If load is uniform, one runtime is cheaper.</a:t>
+            </a:r>
+          </a:p>
+          <a:p>
+            <a:pPr lvl="0" indent="0" marL="0">
               <a:buNone/>
             </a:pPr>
             <a:r>

--- a/week-04/presentations/ppts/day-01-monolith-vs-microservices.pptx
+++ b/week-04/presentations/ppts/day-01-monolith-vs-microservices.pptx
@@ -5368,7 +5368,7 @@
             </a:pPr>
             <a:r>
               <a:rPr b="1"/>
-              <a:t>Draft TCD §1 — Architecture stance</a:t>
+              <a:t>Draft TCD Section 1 — Architecture stance</a:t>
             </a:r>
           </a:p>
         </p:txBody>
@@ -5571,16 +5571,16 @@
             </a:pPr>
             <a:r>
               <a:rPr/>
-              <a:t>Run the three-question frame against your locked PRD feature. Draft TCD §1.</a:t>
-            </a:r>
-          </a:p>
-          <a:p>
-            <a:pPr lvl="0" indent="0" marL="0">
-              <a:buNone/>
-            </a:pPr>
-            <a:r>
-              <a:rPr/>
-              <a:t>5 min: re-read PRD §10 (Dependencies)</a:t>
+              <a:t>Run the three-question frame against your locked PRD feature. Draft TCD Section 1.</a:t>
+            </a:r>
+          </a:p>
+          <a:p>
+            <a:pPr lvl="0" indent="0" marL="0">
+              <a:buNone/>
+            </a:pPr>
+            <a:r>
+              <a:rPr/>
+              <a:t>5 min: re-read PRD Section 10 (Dependencies)</a:t>
             </a:r>
           </a:p>
           <a:p>
@@ -5598,7 +5598,7 @@
             </a:pPr>
             <a:r>
               <a:rPr/>
-              <a:t>15 min: draft §1</a:t>
+              <a:t>15 min: draft Section 1</a:t>
             </a:r>
           </a:p>
           <a:p>
@@ -6183,7 +6183,7 @@
             </a:pPr>
             <a:r>
               <a:rPr/>
-              <a:t>Two-way contracts go on the Stakeholder + Sign-off matrix (TCD §6, Friday).</a:t>
+              <a:t>Two-way contracts go on the Stakeholder + Sign-off matrix (TCD Section 6, Friday).</a:t>
             </a:r>
           </a:p>
         </p:txBody>
@@ -6267,7 +6267,7 @@
             </a:pPr>
             <a:r>
               <a:rPr/>
-              <a:t>List integrations from PRD §10 + anything missed. Characterize each. Mark two-way contracts.</a:t>
+              <a:t>List integrations from PRD Section 10 + anything missed. Characterize each. Mark two-way contracts.</a:t>
             </a:r>
           </a:p>
           <a:p>
@@ -6608,7 +6608,7 @@
             </a:pPr>
             <a:r>
               <a:rPr/>
-              <a:t>🧿 Today’s Two Prompts</a:t>
+              <a:t>🤖 Today’s Two Prompts</a:t>
             </a:r>
           </a:p>
         </p:txBody>
@@ -6642,7 +6642,7 @@
             </a:pPr>
             <a:r>
               <a:rPr/>
-              <a:t>Paste TCD §1 + integration table. Ask for the 3 strongest objections, each with the specific scenario.</a:t>
+              <a:t>Paste TCD Section 1 + integration table. Ask for the 3 strongest objections, each with the specific scenario.</a:t>
             </a:r>
           </a:p>
           <a:p>
@@ -6744,7 +6744,7 @@
             </a:pPr>
             <a:r>
               <a:rPr/>
-              <a:t>Run Prompt A and Prompt B. Adopt / defer / reject each suggestion. Update §1 + §2. Add provenance note.</a:t>
+              <a:t>Run Prompt A and Prompt B. Adopt / defer / reject each suggestion. Update Section 1 + Section 2. Add provenance note.</a:t>
             </a:r>
           </a:p>
           <a:p>
@@ -6780,7 +6780,7 @@
             </a:pPr>
             <a:r>
               <a:rPr/>
-              <a:t>10 min: update §§1–2 + provenance note</a:t>
+              <a:t>10 min: update Sections 1–2 + provenance note</a:t>
             </a:r>
           </a:p>
           <a:p>
@@ -6960,7 +6960,7 @@
             </a:pPr>
             <a:r>
               <a:rPr/>
-              <a:t>Bring to Day 2: Your TCD §§1–2. We’ll thread the security model through them tomorrow.</a:t>
+              <a:t>Bring to Day 2: Your TCD Sections 1–2. We’ll thread the security model through them tomorrow.</a:t>
             </a:r>
           </a:p>
         </p:txBody>

--- a/week-04/presentations/ppts/day-01-monolith-vs-microservices.pptx
+++ b/week-04/presentations/ppts/day-01-monolith-vs-microservices.pptx
@@ -5571,7 +5571,7 @@
             </a:pPr>
             <a:r>
               <a:rPr/>
-              <a:t>Run the three-question frame against your locked PRD feature. Draft TCD Section 1.</a:t>
+              <a:t>Run the three-question frame against your locked Product Requirements Document (PRD) feature. Draft TCD Section 1.</a:t>
             </a:r>
           </a:p>
           <a:p>
@@ -5988,6 +5988,15 @@
             </a:pPr>
             <a:r>
               <a:rPr/>
+              <a:t>Each integration carries a failure stance — e.g., single sign-on (SSO) for auth, a dead-letter queue (DLQ) for audit writes — which later hardens into acceptance criteria (AC).</a:t>
+            </a:r>
+          </a:p>
+          <a:p>
+            <a:pPr lvl="0" indent="0" marL="0">
+              <a:buNone/>
+            </a:pPr>
+            <a:r>
+              <a:rPr/>
               <a:t>“Failure handling: TBD” is fine if it’s an open question. “Hopefully it works” is not.</a:t>
             </a:r>
           </a:p>
@@ -6060,7 +6069,7 @@
             </a:pPr>
             <a:r>
               <a:rPr/>
-              <a:t>Some integrations require coordination with another team — they have to change something for you. Mark these explicitly.</a:t>
+              <a:t>Some integrations require coordination with another team — they have to change something for you, sometimes touching personally identifiable information (PII) handling. Mark these explicitly.</a:t>
             </a:r>
           </a:p>
           <a:p>
@@ -6942,16 +6951,16 @@
             </a:pPr>
             <a:r>
               <a:rPr/>
-              <a:t>STRIDE threat-model pass</a:t>
-            </a:r>
-          </a:p>
-          <a:p>
-            <a:pPr lvl="0" indent="0" marL="0">
-              <a:buNone/>
-            </a:pPr>
-            <a:r>
-              <a:rPr/>
-              <a:t>Revising PRD’s Security NFRs at architectural level</a:t>
+              <a:t>Threat-model pass using the STRIDE model (Spoofing, Tampering, Repudiation, Information disclosure, Denial of service, Elevation of privilege)</a:t>
+            </a:r>
+          </a:p>
+          <a:p>
+            <a:pPr lvl="0" indent="0" marL="0">
+              <a:buNone/>
+            </a:pPr>
+            <a:r>
+              <a:rPr/>
+              <a:t>Revising PRD’s Security non-functional requirements (NFRs) at architectural level</a:t>
             </a:r>
           </a:p>
           <a:p>
@@ -7134,7 +7143,7 @@
             </a:pPr>
             <a:r>
               <a:rPr/>
-              <a:t>Draft Section 1 of the TCD — your architecture stance with trade-off and revisit trigger</a:t>
+              <a:t>Draft Section 1 of the Technical Concept Document (TCD) — your architecture stance with trade-off and revisit trigger</a:t>
             </a:r>
           </a:p>
           <a:p>

--- a/week-04/presentations/ppts/day-01-monolith-vs-microservices.pptx
+++ b/week-04/presentations/ppts/day-01-monolith-vs-microservices.pptx
@@ -5435,6 +5435,24 @@
           <a:bodyPr/>
           <a:lstStyle/>
           <a:p>
+            <a:pPr lvl="0" indent="0">
+              <a:buNone/>
+            </a:pPr>
+            <a:r>
+              <a:rPr>
+                <a:latin typeface="Courier"/>
+              </a:rPr>
+              <a:t>## 1. Architecture stance
+We propose this feature ship as **&lt;modular monolith / new module
+in the existing service / new microservice / hybrid&gt;** because:
+- **Deploy cadence:** [whose tempo are we protecting]
+- **Failure domain:** [what should keep running if X fails]
+- **Scaling axis:** [what curve do we expect]
+**Trade-off accepted:** [the cost of this choice — be honest]
+**Revisit if:** [the trigger that would change the answer]</a:t>
+            </a:r>
+          </a:p>
+          <a:p>
             <a:pPr lvl="0" indent="0" marL="0">
               <a:buNone/>
             </a:pPr>
@@ -5492,6 +5510,48 @@
           </a:p>
         </p:txBody>
       </p:sp>
+      <p:sp>
+        <p:nvSpPr>
+          <p:cNvPr id="3" name="Content Placeholder 2"/>
+          <p:cNvSpPr>
+            <a:spLocks noGrp="1"/>
+          </p:cNvSpPr>
+          <p:nvPr>
+            <p:ph idx="1"/>
+          </p:nvPr>
+        </p:nvSpPr>
+        <p:spPr/>
+        <p:txBody>
+          <a:bodyPr/>
+          <a:lstStyle/>
+          <a:p>
+            <a:pPr lvl="0" indent="0">
+              <a:buNone/>
+            </a:pPr>
+            <a:r>
+              <a:rPr>
+                <a:latin typeface="Courier"/>
+              </a:rPr>
+              <a:t>## 1. Architecture stance
+We propose this feature ship as a **new module in the existing
+mobile-app monolith** because:
+- **Deploy cadence:** Only the Dispatcher Workflow squad will own
+this code; we have no cross-team deploy contention to resolve.
+- **Failure domain:** Reconcile depends on Tickets API and Auth;
+if either is down, the feature can't function. Separation buys
+no resilience.
+- **Scaling axis:** Reconcile traffic is bounded by dispatcher
+shifts (predictable daily curve, &lt; 10K active dispatchers).
+Same scale curve as the rest of the mobile app.
+**Trade-off accepted:** A future split (e.g., into a "shift-end
+workflows" service) becomes harder once this code lives next to
+existing modules.
+**Revisit if:** Reconcile traffic exceeds 5x rest-of-app, OR a
+second team starts contributing reconcile features.</a:t>
+            </a:r>
+          </a:p>
+        </p:txBody>
+      </p:sp>
     </p:spTree>
   </p:cSld>
 </p:sld>
@@ -6670,6 +6730,24 @@
             <a:r>
               <a:rPr/>
               <a:t>Paste integration table. Ask: “what categories of dependency are commonly forgotten for a feature with this footprint?”</a:t>
+            </a:r>
+          </a:p>
+          <a:p>
+            <a:pPr lvl="0" indent="0">
+              <a:buNone/>
+            </a:pPr>
+            <a:r>
+              <a:rPr>
+                <a:latin typeface="Courier"/>
+              </a:rPr>
+              <a:t>Role: Senior staff engineer reviewing an architecture stance.
+Context: &lt;paste TCD Section 1 + integration table&gt;
+Task: Identify the 3 strongest objections to the stance.
+Constraints:
+- Treat the proposed approach as a starting point, not a verdict
+- For each objection, name the specific scenario where it would matter
+- Flag any place the rationale relies on assumptions not stated above
+Format: Numbered list of objections, each with a scenario.</a:t>
             </a:r>
           </a:p>
         </p:txBody>

--- a/week-04/presentations/ppts/day-01-monolith-vs-microservices.pptx
+++ b/week-04/presentations/ppts/day-01-monolith-vs-microservices.pptx
@@ -628,7 +628,7 @@
             </a:pPr>
             <a:r>
               <a:rPr/>
-              <a:t>If a triad’s “revisit if” is “later” or “when needed”, it’s not a real trigger. Force a metric or organizational change.</a:t>
+              <a:t>If a quad’s “revisit if” is “later” or “when needed”, it’s not a real trigger. Force a metric or organizational change.</a:t>
             </a:r>
           </a:p>
         </p:txBody>
@@ -1038,7 +1038,7 @@
             </a:pPr>
             <a:r>
               <a:rPr/>
-              <a:t>Two-way contracts are the most-missed dependencies. Triads who skip them ship late.</a:t>
+              <a:t>Two-way contracts are the most-missed dependencies. Quads who skip them ship late.</a:t>
             </a:r>
           </a:p>
         </p:txBody>
@@ -1202,7 +1202,7 @@
             </a:pPr>
             <a:r>
               <a:rPr/>
-              <a:t>AI returns today as a stress-tester, not an author. Triads use it to challenge their stance — keep the provenance log discipline from Week 2 Day 4.</a:t>
+              <a:t>AI returns today as a stress-tester, not an author. Quads use it to challenge their stance — keep the provenance log discipline from Week 2 Day 4.</a:t>
             </a:r>
           </a:p>
         </p:txBody>
@@ -1366,7 +1366,7 @@
             </a:pPr>
             <a:r>
               <a:rPr/>
-              <a:t>Triads should add both prompts to their Pattern Library after today.</a:t>
+              <a:t>Quads should add both prompts to their Pattern Library after today.</a:t>
             </a:r>
           </a:p>
         </p:txBody>
@@ -1448,7 +1448,7 @@
             </a:pPr>
             <a:r>
               <a:rPr/>
-              <a:t>By 16:00, every triad has a defended stance — not a final architecture, a starting point for the architect.</a:t>
+              <a:t>By 16:00, every quad has a defended stance — not a final architecture, a starting point for the architect.</a:t>
             </a:r>
           </a:p>
         </p:txBody>
@@ -1530,7 +1530,7 @@
             </a:pPr>
             <a:r>
               <a:rPr/>
-              <a:t>Catch any output that sounds like fortune-cookie generic prose — rewrite in the triad’s voice.</a:t>
+              <a:t>Catch any output that sounds like fortune-cookie generic prose — rewrite in the quad’s voice.</a:t>
             </a:r>
           </a:p>
         </p:txBody>
@@ -2268,7 +2268,7 @@
             </a:pPr>
             <a:r>
               <a:rPr/>
-              <a:t>Triads now translate Week-3 PRDs into a stance. The “we don’t know” line is allowed once; more than that, the stance isn’t earned.</a:t>
+              <a:t>Quads now translate Week-3 PRDs into a stance. The “we don’t know” line is allowed once; more than that, the stance isn’t earned.</a:t>
             </a:r>
           </a:p>
         </p:txBody>
@@ -5622,7 +5622,7 @@
             </a:pPr>
             <a:r>
               <a:rPr b="1"/>
-              <a:t>Triads • 40 minutes</a:t>
+              <a:t>Quads • 40 minutes</a:t>
             </a:r>
           </a:p>
           <a:p>
@@ -6327,7 +6327,7 @@
             </a:pPr>
             <a:r>
               <a:rPr b="1"/>
-              <a:t>Triads • 40 minutes</a:t>
+              <a:t>Quads • 40 minutes</a:t>
             </a:r>
           </a:p>
           <a:p>
@@ -6822,7 +6822,7 @@
             </a:pPr>
             <a:r>
               <a:rPr b="1"/>
-              <a:t>Triads • 45 minutes • Wrap</a:t>
+              <a:t>Quads • 45 minutes • Wrap</a:t>
             </a:r>
           </a:p>
           <a:p>
@@ -8127,7 +8127,7 @@
             </a:pPr>
             <a:r>
               <a:rPr b="1"/>
-              <a:t>Triads • 35 minutes</a:t>
+              <a:t>Quads • 35 minutes</a:t>
             </a:r>
           </a:p>
           <a:p>

--- a/week-04/presentations/ppts/day-01-monolith-vs-microservices.pptx
+++ b/week-04/presentations/ppts/day-01-monolith-vs-microservices.pptx
@@ -5622,7 +5622,7 @@
             </a:pPr>
             <a:r>
               <a:rPr b="1"/>
-              <a:t>Quads • 40 minutes</a:t>
+              <a:t>Quads • 50 minutes</a:t>
             </a:r>
           </a:p>
           <a:p>
@@ -6327,7 +6327,7 @@
             </a:pPr>
             <a:r>
               <a:rPr b="1"/>
-              <a:t>Quads • 40 minutes</a:t>
+              <a:t>Quads • 50 minutes</a:t>
             </a:r>
           </a:p>
           <a:p>
@@ -6822,7 +6822,7 @@
             </a:pPr>
             <a:r>
               <a:rPr b="1"/>
-              <a:t>Quads • 45 minutes • Wrap</a:t>
+              <a:t>Quads • 55 minutes • Wrap</a:t>
             </a:r>
           </a:p>
           <a:p>
@@ -8127,7 +8127,7 @@
             </a:pPr>
             <a:r>
               <a:rPr b="1"/>
-              <a:t>Quads • 35 minutes</a:t>
+              <a:t>Quads • 45 minutes</a:t>
             </a:r>
           </a:p>
           <a:p>

--- a/week-04/presentations/ppts/day-01-monolith-vs-microservices.pptx
+++ b/week-04/presentations/ppts/day-01-monolith-vs-microservices.pptx
@@ -5649,7 +5649,7 @@
             </a:pPr>
             <a:r>
               <a:rPr/>
-              <a:t>15 min: 3-question pass; honest answers with evidence</a:t>
+              <a:t>25 min: 3-question pass; honest answers with evidence</a:t>
             </a:r>
           </a:p>
           <a:p>
@@ -5676,7 +5676,7 @@
             </a:pPr>
             <a:r>
               <a:rPr/>
-              <a:t>⏱ 5 + 15 + 15 + 5</a:t>
+              <a:t>⏱ 5 + 25 + 15 + 5</a:t>
             </a:r>
           </a:p>
         </p:txBody>
@@ -6345,7 +6345,7 @@
             </a:pPr>
             <a:r>
               <a:rPr/>
-              <a:t>15 min: list integrations</a:t>
+              <a:t>25 min: list integrations</a:t>
             </a:r>
           </a:p>
           <a:p>
@@ -6372,7 +6372,7 @@
             </a:pPr>
             <a:r>
               <a:rPr/>
-              <a:t>⏱ 15 + 15 + 10</a:t>
+              <a:t>⏱ 25 + 15 + 10</a:t>
             </a:r>
           </a:p>
         </p:txBody>
@@ -6840,7 +6840,7 @@
             </a:pPr>
             <a:r>
               <a:rPr/>
-              <a:t>10 min: Prompt A → 3 objections</a:t>
+              <a:t>20 min: Prompt A → 3 objections</a:t>
             </a:r>
           </a:p>
           <a:p>
@@ -6885,7 +6885,7 @@
             </a:pPr>
             <a:r>
               <a:rPr/>
-              <a:t>⏱ 10 + 10 + 10 + 10 + 5 · 15-min wrap</a:t>
+              <a:t>⏱ 20 + 10 + 10 + 10 + 5 · 15-min wrap</a:t>
             </a:r>
           </a:p>
         </p:txBody>
@@ -8145,7 +8145,7 @@
             </a:pPr>
             <a:r>
               <a:rPr/>
-              <a:t>15 min: stamp all 8</a:t>
+              <a:t>25 min: stamp all 8</a:t>
             </a:r>
           </a:p>
           <a:p>
